--- a/soutenance.pptx
+++ b/soutenance.pptx
@@ -3724,7 +3724,7 @@
             <a:pPr/>
             <a:r>
               <a:rPr sz="2000"/>
-              <a:t>• AUPRC test 0,66 vs baseline 0,31 — AUC 0,81 — train 0,64 : pas de sur-apprentissage</a:t>
+              <a:t>• AUPRC test 0,61 vs baseline 0,31 — AUC 0,81 — train 0,64 : pas de sur-apprentissage</a:t>
             </a:r>
           </a:p>
           <a:p>
